--- a/гінеколог.pptx
+++ b/гінеколог.pptx
@@ -7,7 +7,7 @@
     <p:sldMasterId id="2147483705" r:id="rId3"/>
   </p:sldMasterIdLst>
   <p:notesMasterIdLst>
-    <p:notesMasterId r:id="rId22"/>
+    <p:notesMasterId r:id="rId23"/>
   </p:notesMasterIdLst>
   <p:sldIdLst>
     <p:sldId id="256" r:id="rId4"/>
@@ -28,6 +28,7 @@
     <p:sldId id="419" r:id="rId19"/>
     <p:sldId id="266" r:id="rId20"/>
     <p:sldId id="258" r:id="rId21"/>
+    <p:sldId id="1567" r:id="rId22"/>
   </p:sldIdLst>
   <p:sldSz cx="12192000" cy="6858000"/>
   <p:notesSz cx="6735763" cy="9866313"/>
@@ -137,7 +138,7 @@
 <file path=ppt/charts/chart1.xml><?xml version="1.0" encoding="utf-8"?>
 <c:chartSpace xmlns:c="http://schemas.openxmlformats.org/drawingml/2006/chart" xmlns:a="http://schemas.openxmlformats.org/drawingml/2006/main" xmlns:r="http://schemas.openxmlformats.org/officeDocument/2006/relationships" xmlns:c16r2="http://schemas.microsoft.com/office/drawing/2015/06/chart">
   <c:date1904 val="0"/>
-  <c:lang val="ru-RU"/>
+  <c:lang val="uk-UA"/>
   <c:roundedCorners val="0"/>
   <mc:AlternateContent xmlns:mc="http://schemas.openxmlformats.org/markup-compatibility/2006">
     <mc:Choice xmlns:c14="http://schemas.microsoft.com/office/drawing/2007/8/2/chart" Requires="c14">
@@ -408,7 +409,7 @@
                       <a:pPr>
                         <a:defRPr sz="2000"/>
                       </a:pPr>
-                      <a:t>[ИМЯ КАТЕГОРИИ]</a:t>
+                      <a:t>[ІМ’Я КАТЕГОРІЇ]</a:t>
                     </a:fld>
                     <a:r>
                       <a:rPr lang="uk-UA" sz="1800" baseline="0" dirty="0"/>
@@ -419,7 +420,7 @@
                       <a:pPr>
                         <a:defRPr sz="2000"/>
                       </a:pPr>
-                      <a:t>[ЗНАЧЕНИЕ]</a:t>
+                      <a:t>[ЗНАЧЕННЯ]</a:t>
                     </a:fld>
                     <a:endParaRPr lang="uk-UA" sz="1800" baseline="0" dirty="0"/>
                   </a:p>
@@ -508,7 +509,7 @@
                           </a:solidFill>
                         </a:defRPr>
                       </a:pPr>
-                      <a:t>[ИМЯ КАТЕГОРИИ]</a:t>
+                      <a:t>[ІМ’Я КАТЕГОРІЇ]</a:t>
                     </a:fld>
                     <a:r>
                       <a:rPr lang="uk-UA" sz="1800" baseline="0" dirty="0"/>
@@ -523,7 +524,7 @@
                           </a:solidFill>
                         </a:defRPr>
                       </a:pPr>
-                      <a:t>[ЗНАЧЕНИЕ]</a:t>
+                      <a:t>[ЗНАЧЕННЯ]</a:t>
                     </a:fld>
                     <a:endParaRPr lang="uk-UA" sz="1800" baseline="0" dirty="0"/>
                   </a:p>
@@ -612,7 +613,7 @@
                           </a:solidFill>
                         </a:defRPr>
                       </a:pPr>
-                      <a:t>[ИМЯ КАТЕГОРИИ]</a:t>
+                      <a:t>[ІМ’Я КАТЕГОРІЇ]</a:t>
                     </a:fld>
                     <a:r>
                       <a:rPr lang="uk-UA" sz="1800" dirty="0"/>
@@ -643,7 +644,7 @@
                           </a:solidFill>
                         </a:defRPr>
                       </a:pPr>
-                      <a:t>[ЗНАЧЕНИЕ]</a:t>
+                      <a:t>[ЗНАЧЕННЯ]</a:t>
                     </a:fld>
                     <a:endParaRPr lang="uk-UA" sz="1800" dirty="0"/>
                   </a:p>
@@ -732,7 +733,7 @@
                           </a:solidFill>
                         </a:defRPr>
                       </a:pPr>
-                      <a:t>[ИМЯ КАТЕГОРИИ]</a:t>
+                      <a:t>[ІМ’Я КАТЕГОРІЇ]</a:t>
                     </a:fld>
                     <a:r>
                       <a:rPr lang="uk-UA" sz="1800" baseline="0" dirty="0"/>
@@ -747,7 +748,7 @@
                           </a:solidFill>
                         </a:defRPr>
                       </a:pPr>
-                      <a:t>[ЗНАЧЕНИЕ]</a:t>
+                      <a:t>[ЗНАЧЕННЯ]</a:t>
                     </a:fld>
                     <a:endParaRPr lang="uk-UA" sz="1800" baseline="0" dirty="0"/>
                   </a:p>
@@ -836,7 +837,7 @@
                           </a:solidFill>
                         </a:defRPr>
                       </a:pPr>
-                      <a:t>[ИМЯ КАТЕГОРИИ]</a:t>
+                      <a:t>[ІМ’Я КАТЕГОРІЇ]</a:t>
                     </a:fld>
                     <a:r>
                       <a:rPr lang="uk-UA" sz="1800" baseline="0" dirty="0"/>
@@ -851,7 +852,7 @@
                           </a:solidFill>
                         </a:defRPr>
                       </a:pPr>
-                      <a:t>[ЗНАЧЕНИЕ]</a:t>
+                      <a:t>[ЗНАЧЕННЯ]</a:t>
                     </a:fld>
                     <a:endParaRPr lang="uk-UA" sz="1800" baseline="0" dirty="0"/>
                   </a:p>
@@ -1026,6 +1027,7 @@
     </c:plotArea>
     <c:plotVisOnly val="1"/>
     <c:dispBlanksAs val="gap"/>
+    <c:showDLblsOverMax val="0"/>
     <c:extLst>
       <c:ext xmlns:c16r3="http://schemas.microsoft.com/office/drawing/2017/03/chart" uri="{56B9EC1D-385E-4148-901F-78D8002777C0}">
         <c16r3:dataDisplayOptions16>
@@ -1033,7 +1035,6 @@
         </c16r3:dataDisplayOptions16>
       </c:ext>
     </c:extLst>
-    <c:showDLblsOverMax val="0"/>
   </c:chart>
   <c:spPr>
     <a:noFill/>
@@ -7158,7 +7159,7 @@
           <a:p>
             <a:fld id="{A0FC24A9-5C16-41E0-BCC3-0D5A27D63234}" type="datetimeFigureOut">
               <a:rPr lang="ru-RU" smtClean="0"/>
-              <a:t>09.02.2026</a:t>
+              <a:t>14.04.2026</a:t>
             </a:fld>
             <a:endParaRPr lang="ru-RU"/>
           </a:p>
@@ -7317,7 +7318,7 @@
           <a:p>
             <a:fld id="{D59B57D3-78E7-4F95-94DC-6BA760D6CAEB}" type="slidenum">
               <a:rPr lang="ru-RU" smtClean="0"/>
-              <a:t>‹#›</a:t>
+              <a:t>‹№›</a:t>
             </a:fld>
             <a:endParaRPr lang="ru-RU"/>
           </a:p>
@@ -7830,6 +7831,90 @@
 </p:notes>
 </file>
 
+<file path=ppt/notesSlides/notesSlide4.xml><?xml version="1.0" encoding="utf-8"?>
+<p:notes xmlns:a="http://schemas.openxmlformats.org/drawingml/2006/main" xmlns:r="http://schemas.openxmlformats.org/officeDocument/2006/relationships" xmlns:p="http://schemas.openxmlformats.org/presentationml/2006/main">
+  <p:cSld>
+    <p:spTree>
+      <p:nvGrpSpPr>
+        <p:cNvPr id="1" name=""/>
+        <p:cNvGrpSpPr/>
+        <p:nvPr/>
+      </p:nvGrpSpPr>
+      <p:grpSpPr>
+        <a:xfrm>
+          <a:off x="0" y="0"/>
+          <a:ext cx="0" cy="0"/>
+          <a:chOff x="0" y="0"/>
+          <a:chExt cx="0" cy="0"/>
+        </a:xfrm>
+      </p:grpSpPr>
+      <p:sp>
+        <p:nvSpPr>
+          <p:cNvPr id="2" name="Місце для зображення 1"/>
+          <p:cNvSpPr>
+            <a:spLocks noGrp="1" noRot="1" noChangeAspect="1"/>
+          </p:cNvSpPr>
+          <p:nvPr>
+            <p:ph type="sldImg"/>
+          </p:nvPr>
+        </p:nvSpPr>
+        <p:spPr/>
+      </p:sp>
+      <p:sp>
+        <p:nvSpPr>
+          <p:cNvPr id="3" name="Місце для нотаток 2"/>
+          <p:cNvSpPr>
+            <a:spLocks noGrp="1"/>
+          </p:cNvSpPr>
+          <p:nvPr>
+            <p:ph type="body" idx="1"/>
+          </p:nvPr>
+        </p:nvSpPr>
+        <p:spPr/>
+        <p:txBody>
+          <a:bodyPr/>
+          <a:lstStyle/>
+          <a:p>
+            <a:endParaRPr lang="uk-UA" dirty="0"/>
+          </a:p>
+        </p:txBody>
+      </p:sp>
+      <p:sp>
+        <p:nvSpPr>
+          <p:cNvPr id="4" name="Місце для номера слайда 3"/>
+          <p:cNvSpPr>
+            <a:spLocks noGrp="1"/>
+          </p:cNvSpPr>
+          <p:nvPr>
+            <p:ph type="sldNum" sz="quarter" idx="5"/>
+          </p:nvPr>
+        </p:nvSpPr>
+        <p:spPr/>
+        <p:txBody>
+          <a:bodyPr/>
+          <a:lstStyle/>
+          <a:p>
+            <a:fld id="{F548F3F4-2396-4BF1-8EF7-1BE0593ABCC8}" type="slidenum">
+              <a:rPr lang="uk-UA" smtClean="0"/>
+              <a:t>19</a:t>
+            </a:fld>
+            <a:endParaRPr lang="uk-UA"/>
+          </a:p>
+        </p:txBody>
+      </p:sp>
+    </p:spTree>
+    <p:extLst>
+      <p:ext uri="{BB962C8B-B14F-4D97-AF65-F5344CB8AC3E}">
+        <p14:creationId xmlns:p14="http://schemas.microsoft.com/office/powerpoint/2010/main" val="1974502638"/>
+      </p:ext>
+    </p:extLst>
+  </p:cSld>
+  <p:clrMapOvr>
+    <a:masterClrMapping/>
+  </p:clrMapOvr>
+</p:notes>
+</file>
+
 <file path=ppt/slideLayouts/slideLayout1.xml><?xml version="1.0" encoding="utf-8"?>
 <p:sldLayout xmlns:a="http://schemas.openxmlformats.org/drawingml/2006/main" xmlns:r="http://schemas.openxmlformats.org/officeDocument/2006/relationships" xmlns:p="http://schemas.openxmlformats.org/presentationml/2006/main" showMasterSp="0" type="title" preserve="1">
   <p:cSld name="Титульний слайд">
@@ -9251,7 +9336,7 @@
           <a:p>
             <a:fld id="{F0160408-1E49-4E19-89E7-997816F253FB}" type="datetimeFigureOut">
               <a:rPr lang="uk-UA" smtClean="0"/>
-              <a:t>09.02.2026</a:t>
+              <a:t>14.04.2026</a:t>
             </a:fld>
             <a:endParaRPr lang="uk-UA"/>
           </a:p>
@@ -9305,7 +9390,7 @@
           <a:p>
             <a:fld id="{D55A3BFF-3061-4902-8FCD-F143167DCFBD}" type="slidenum">
               <a:rPr lang="uk-UA" smtClean="0"/>
-              <a:t>‹#›</a:t>
+              <a:t>‹№›</a:t>
             </a:fld>
             <a:endParaRPr lang="uk-UA"/>
           </a:p>
@@ -9473,7 +9558,7 @@
           <a:p>
             <a:fld id="{5A069CB8-F204-4D06-B913-C5A26A89888A}" type="datetimeFigureOut">
               <a:rPr lang="en-US" smtClean="0"/>
-              <a:t>2/9/2026</a:t>
+              <a:t>4/14/2026</a:t>
             </a:fld>
             <a:endParaRPr lang="en-US" dirty="0"/>
           </a:p>
@@ -9527,7 +9612,7 @@
           <a:p>
             <a:fld id="{4FAB73BC-B049-4115-A692-8D63A059BFB8}" type="slidenum">
               <a:rPr lang="en-US" smtClean="0"/>
-              <a:t>‹#›</a:t>
+              <a:t>‹№›</a:t>
             </a:fld>
             <a:endParaRPr lang="en-US" dirty="0"/>
           </a:p>
@@ -9673,7 +9758,7 @@
           <a:p>
             <a:fld id="{D30BB376-B19C-488D-ABEB-03C7E6E9E3E0}" type="datetimeFigureOut">
               <a:rPr lang="en-US" smtClean="0"/>
-              <a:t>2/9/2026</a:t>
+              <a:t>4/14/2026</a:t>
             </a:fld>
             <a:endParaRPr lang="en-US" dirty="0"/>
           </a:p>
@@ -9727,7 +9812,7 @@
           <a:p>
             <a:fld id="{629637A9-119A-49DA-BD12-AAC58B377D80}" type="slidenum">
               <a:rPr lang="en-US" smtClean="0"/>
-              <a:t>‹#›</a:t>
+              <a:t>‹№›</a:t>
             </a:fld>
             <a:endParaRPr lang="en-US" dirty="0"/>
           </a:p>
@@ -9949,7 +10034,7 @@
           <a:p>
             <a:fld id="{486F077B-A50F-4D64-8574-E2D6A98A5553}" type="datetimeFigureOut">
               <a:rPr lang="en-US" smtClean="0"/>
-              <a:t>2/9/2026</a:t>
+              <a:t>4/14/2026</a:t>
             </a:fld>
             <a:endParaRPr lang="en-US" dirty="0"/>
           </a:p>
@@ -10003,7 +10088,7 @@
           <a:p>
             <a:fld id="{4FAB73BC-B049-4115-A692-8D63A059BFB8}" type="slidenum">
               <a:rPr lang="en-US" smtClean="0"/>
-              <a:t>‹#›</a:t>
+              <a:t>‹№›</a:t>
             </a:fld>
             <a:endParaRPr lang="en-US" dirty="0"/>
           </a:p>
@@ -10270,7 +10355,7 @@
           <a:p>
             <a:fld id="{7D9E2A62-1983-43A1-A163-D8AA46534C80}" type="datetimeFigureOut">
               <a:rPr lang="en-US" smtClean="0"/>
-              <a:t>2/9/2026</a:t>
+              <a:t>4/14/2026</a:t>
             </a:fld>
             <a:endParaRPr lang="en-US" dirty="0"/>
           </a:p>
@@ -10324,7 +10409,7 @@
           <a:p>
             <a:fld id="{4FAB73BC-B049-4115-A692-8D63A059BFB8}" type="slidenum">
               <a:rPr lang="en-US" smtClean="0"/>
-              <a:t>‹#›</a:t>
+              <a:t>‹№›</a:t>
             </a:fld>
             <a:endParaRPr lang="en-US" dirty="0"/>
           </a:p>
@@ -10685,7 +10770,7 @@
           <a:p>
             <a:fld id="{898F3E3B-34E3-4345-B2A1-994B83598A9C}" type="datetimeFigureOut">
               <a:rPr lang="en-US" smtClean="0"/>
-              <a:t>2/9/2026</a:t>
+              <a:t>4/14/2026</a:t>
             </a:fld>
             <a:endParaRPr lang="en-US" dirty="0"/>
           </a:p>
@@ -10739,7 +10824,7 @@
           <a:p>
             <a:fld id="{4FAB73BC-B049-4115-A692-8D63A059BFB8}" type="slidenum">
               <a:rPr lang="en-US" smtClean="0"/>
-              <a:t>‹#›</a:t>
+              <a:t>‹№›</a:t>
             </a:fld>
             <a:endParaRPr lang="en-US" dirty="0"/>
           </a:p>
@@ -10827,7 +10912,7 @@
           <a:p>
             <a:fld id="{FD816C96-82A1-4D77-8ADA-627AC6FE3D65}" type="datetimeFigureOut">
               <a:rPr lang="en-US" smtClean="0"/>
-              <a:t>2/9/2026</a:t>
+              <a:t>4/14/2026</a:t>
             </a:fld>
             <a:endParaRPr lang="en-US" dirty="0"/>
           </a:p>
@@ -10881,7 +10966,7 @@
           <a:p>
             <a:fld id="{4FAB73BC-B049-4115-A692-8D63A059BFB8}" type="slidenum">
               <a:rPr lang="en-US" smtClean="0"/>
-              <a:t>‹#›</a:t>
+              <a:t>‹№›</a:t>
             </a:fld>
             <a:endParaRPr lang="en-US" dirty="0"/>
           </a:p>
@@ -10940,7 +11025,7 @@
           <a:p>
             <a:fld id="{F0160408-1E49-4E19-89E7-997816F253FB}" type="datetimeFigureOut">
               <a:rPr lang="uk-UA" smtClean="0"/>
-              <a:t>09.02.2026</a:t>
+              <a:t>14.04.2026</a:t>
             </a:fld>
             <a:endParaRPr lang="uk-UA"/>
           </a:p>
@@ -10994,7 +11079,7 @@
           <a:p>
             <a:fld id="{D55A3BFF-3061-4902-8FCD-F143167DCFBD}" type="slidenum">
               <a:rPr lang="uk-UA" smtClean="0"/>
-              <a:t>‹#›</a:t>
+              <a:t>‹№›</a:t>
             </a:fld>
             <a:endParaRPr lang="uk-UA"/>
           </a:p>
@@ -11253,7 +11338,7 @@
           <a:p>
             <a:fld id="{24271A48-F18A-45B3-BC05-1E27DA3F88AF}" type="datetimeFigureOut">
               <a:rPr lang="en-US" smtClean="0"/>
-              <a:t>2/9/2026</a:t>
+              <a:t>4/14/2026</a:t>
             </a:fld>
             <a:endParaRPr lang="en-US" dirty="0"/>
           </a:p>
@@ -11308,7 +11393,7 @@
             <a:fld id="{4FAB73BC-B049-4115-A692-8D63A059BFB8}" type="slidenum">
               <a:rPr lang="en-US" smtClean="0"/>
               <a:pPr/>
-              <a:t>‹#›</a:t>
+              <a:t>‹№›</a:t>
             </a:fld>
             <a:endParaRPr lang="en-US" dirty="0"/>
           </a:p>
@@ -11543,7 +11628,7 @@
           <a:p>
             <a:fld id="{65B747F8-9654-4282-85D2-65F41AAE7A75}" type="datetimeFigureOut">
               <a:rPr lang="en-US" smtClean="0"/>
-              <a:t>2/9/2026</a:t>
+              <a:t>4/14/2026</a:t>
             </a:fld>
             <a:endParaRPr lang="en-US" dirty="0"/>
           </a:p>
@@ -11597,7 +11682,7 @@
           <a:p>
             <a:fld id="{4FAB73BC-B049-4115-A692-8D63A059BFB8}" type="slidenum">
               <a:rPr lang="en-US" smtClean="0"/>
-              <a:t>‹#›</a:t>
+              <a:t>‹№›</a:t>
             </a:fld>
             <a:endParaRPr lang="en-US" dirty="0"/>
           </a:p>
@@ -11743,7 +11828,7 @@
           <a:p>
             <a:fld id="{50B6E300-0A13-4A81-945A-7333C271A069}" type="datetimeFigureOut">
               <a:rPr lang="en-US" smtClean="0"/>
-              <a:t>2/9/2026</a:t>
+              <a:t>4/14/2026</a:t>
             </a:fld>
             <a:endParaRPr lang="en-US" dirty="0"/>
           </a:p>
@@ -11797,7 +11882,7 @@
           <a:p>
             <a:fld id="{4FAB73BC-B049-4115-A692-8D63A059BFB8}" type="slidenum">
               <a:rPr lang="en-US" smtClean="0"/>
-              <a:t>‹#›</a:t>
+              <a:t>‹№›</a:t>
             </a:fld>
             <a:endParaRPr lang="en-US" dirty="0"/>
           </a:p>
@@ -11953,7 +12038,7 @@
           <a:p>
             <a:fld id="{34671962-1EA4-46E7-BCB0-F36CE46D1A59}" type="datetimeFigureOut">
               <a:rPr lang="en-US" smtClean="0"/>
-              <a:t>2/9/2026</a:t>
+              <a:t>4/14/2026</a:t>
             </a:fld>
             <a:endParaRPr lang="en-US" dirty="0"/>
           </a:p>
@@ -12007,7 +12092,7 @@
           <a:p>
             <a:fld id="{4FAB73BC-B049-4115-A692-8D63A059BFB8}" type="slidenum">
               <a:rPr lang="en-US" smtClean="0"/>
-              <a:t>‹#›</a:t>
+              <a:t>‹№›</a:t>
             </a:fld>
             <a:endParaRPr lang="en-US" dirty="0"/>
           </a:p>
@@ -13072,7 +13157,7 @@
           <a:p>
             <a:fld id="{F0160408-1E49-4E19-89E7-997816F253FB}" type="datetimeFigureOut">
               <a:rPr lang="uk-UA" smtClean="0"/>
-              <a:t>09.02.2026</a:t>
+              <a:t>14.04.2026</a:t>
             </a:fld>
             <a:endParaRPr lang="uk-UA"/>
           </a:p>
@@ -13126,7 +13211,7 @@
           <a:p>
             <a:fld id="{D55A3BFF-3061-4902-8FCD-F143167DCFBD}" type="slidenum">
               <a:rPr lang="uk-UA" smtClean="0"/>
-              <a:t>‹#›</a:t>
+              <a:t>‹№›</a:t>
             </a:fld>
             <a:endParaRPr lang="uk-UA"/>
           </a:p>
@@ -13526,6 +13611,13 @@
             <a:schemeClr val="lt1"/>
           </a:fontRef>
         </p:style>
+        <p:txBody>
+          <a:bodyPr/>
+          <a:lstStyle/>
+          <a:p>
+            <a:endParaRPr lang="uk-UA"/>
+          </a:p>
+        </p:txBody>
       </p:sp>
       <p:sp>
         <p:nvSpPr>
@@ -13566,6 +13658,13 @@
             <a:schemeClr val="lt1"/>
           </a:fontRef>
         </p:style>
+        <p:txBody>
+          <a:bodyPr/>
+          <a:lstStyle/>
+          <a:p>
+            <a:endParaRPr lang="uk-UA"/>
+          </a:p>
+        </p:txBody>
       </p:sp>
       <p:sp>
         <p:nvSpPr>
@@ -14205,6 +14304,13 @@
             <a:schemeClr val="lt1"/>
           </a:fontRef>
         </p:style>
+        <p:txBody>
+          <a:bodyPr/>
+          <a:lstStyle/>
+          <a:p>
+            <a:endParaRPr lang="uk-UA"/>
+          </a:p>
+        </p:txBody>
       </p:sp>
       <p:sp>
         <p:nvSpPr>
@@ -14245,6 +14351,13 @@
             <a:schemeClr val="lt1"/>
           </a:fontRef>
         </p:style>
+        <p:txBody>
+          <a:bodyPr/>
+          <a:lstStyle/>
+          <a:p>
+            <a:endParaRPr lang="uk-UA"/>
+          </a:p>
+        </p:txBody>
       </p:sp>
       <p:sp>
         <p:nvSpPr>
@@ -14995,7 +15108,7 @@
           <a:p>
             <a:fld id="{A1085C96-5E06-406A-BC76-F7F631D5854F}" type="datetimeFigureOut">
               <a:rPr lang="uk-UA" smtClean="0"/>
-              <a:t>09.02.2026</a:t>
+              <a:t>14.04.2026</a:t>
             </a:fld>
             <a:endParaRPr lang="uk-UA"/>
           </a:p>
@@ -15085,7 +15198,7 @@
           <a:p>
             <a:fld id="{2FB93F86-A606-4CF7-96A0-13BFFFC72532}" type="slidenum">
               <a:rPr lang="uk-UA" smtClean="0"/>
-              <a:t>‹#›</a:t>
+              <a:t>‹№›</a:t>
             </a:fld>
             <a:endParaRPr lang="uk-UA"/>
           </a:p>
@@ -18656,9 +18769,7 @@
           <p:cNvGraphicFramePr>
             <a:graphicFrameLocks noGrp="1"/>
           </p:cNvGraphicFramePr>
-          <p:nvPr>
-            <p:extLst/>
-          </p:nvPr>
+          <p:nvPr/>
         </p:nvGraphicFramePr>
         <p:xfrm>
           <a:off x="320774" y="5475385"/>
@@ -22173,6 +22284,444 @@
     <p:extLst>
       <p:ext uri="{BB962C8B-B14F-4D97-AF65-F5344CB8AC3E}">
         <p14:creationId xmlns:p14="http://schemas.microsoft.com/office/powerpoint/2010/main" val="3791040263"/>
+      </p:ext>
+    </p:extLst>
+  </p:cSld>
+  <p:clrMapOvr>
+    <a:masterClrMapping/>
+  </p:clrMapOvr>
+</p:sld>
+</file>
+
+<file path=ppt/slides/slide19.xml><?xml version="1.0" encoding="utf-8"?>
+<p:sld xmlns:a="http://schemas.openxmlformats.org/drawingml/2006/main" xmlns:r="http://schemas.openxmlformats.org/officeDocument/2006/relationships" xmlns:p="http://schemas.openxmlformats.org/presentationml/2006/main">
+  <p:cSld>
+    <p:spTree>
+      <p:nvGrpSpPr>
+        <p:cNvPr id="1" name=""/>
+        <p:cNvGrpSpPr/>
+        <p:nvPr/>
+      </p:nvGrpSpPr>
+      <p:grpSpPr>
+        <a:xfrm>
+          <a:off x="0" y="0"/>
+          <a:ext cx="0" cy="0"/>
+          <a:chOff x="0" y="0"/>
+          <a:chExt cx="0" cy="0"/>
+        </a:xfrm>
+      </p:grpSpPr>
+      <p:pic>
+        <p:nvPicPr>
+          <p:cNvPr id="3" name="Рисунок 2">
+            <a:extLst>
+              <a:ext uri="{FF2B5EF4-FFF2-40B4-BE49-F238E27FC236}">
+                <a16:creationId xmlns:a16="http://schemas.microsoft.com/office/drawing/2014/main" id="{5B169D80-7723-9C79-5008-F148EB4466E2}"/>
+              </a:ext>
+            </a:extLst>
+          </p:cNvPr>
+          <p:cNvPicPr>
+            <a:picLocks noChangeAspect="1"/>
+          </p:cNvPicPr>
+          <p:nvPr/>
+        </p:nvPicPr>
+        <p:blipFill>
+          <a:blip r:embed="rId3" cstate="print">
+            <a:extLst>
+              <a:ext uri="{28A0092B-C50C-407E-A947-70E740481C1C}">
+                <a14:useLocalDpi xmlns:a14="http://schemas.microsoft.com/office/drawing/2010/main" val="0"/>
+              </a:ext>
+            </a:extLst>
+          </a:blip>
+          <a:stretch>
+            <a:fillRect/>
+          </a:stretch>
+        </p:blipFill>
+        <p:spPr>
+          <a:xfrm>
+            <a:off x="6025521" y="197251"/>
+            <a:ext cx="6166479" cy="6166479"/>
+          </a:xfrm>
+          <a:prstGeom prst="rect">
+            <a:avLst/>
+          </a:prstGeom>
+        </p:spPr>
+      </p:pic>
+      <p:sp>
+        <p:nvSpPr>
+          <p:cNvPr id="4" name="TextBox 3">
+            <a:extLst>
+              <a:ext uri="{FF2B5EF4-FFF2-40B4-BE49-F238E27FC236}">
+                <a16:creationId xmlns:a16="http://schemas.microsoft.com/office/drawing/2014/main" id="{A35B0CD2-0969-DC06-9573-3981452B6A9D}"/>
+              </a:ext>
+            </a:extLst>
+          </p:cNvPr>
+          <p:cNvSpPr txBox="1"/>
+          <p:nvPr/>
+        </p:nvSpPr>
+        <p:spPr>
+          <a:xfrm>
+            <a:off x="941173" y="1681486"/>
+            <a:ext cx="4809066" cy="2308324"/>
+          </a:xfrm>
+          <a:prstGeom prst="rect">
+            <a:avLst/>
+          </a:prstGeom>
+          <a:noFill/>
+        </p:spPr>
+        <p:txBody>
+          <a:bodyPr wrap="square" rtlCol="0">
+            <a:spAutoFit/>
+          </a:bodyPr>
+          <a:lstStyle/>
+          <a:p>
+            <a:r>
+              <a:rPr lang="ru-RU" b="1" dirty="0"/>
+              <a:t>SOLO </a:t>
+            </a:r>
+            <a:r>
+              <a:rPr lang="ru-RU" b="1" dirty="0" err="1"/>
+              <a:t>mini</a:t>
+            </a:r>
+            <a:r>
+              <a:rPr lang="ru-RU" b="1" dirty="0"/>
+              <a:t>®– </a:t>
+            </a:r>
+            <a:r>
+              <a:rPr lang="ru-RU" b="1" dirty="0" err="1"/>
+              <a:t>набір</a:t>
+            </a:r>
+            <a:r>
+              <a:rPr lang="ru-RU" b="1" dirty="0"/>
+              <a:t> </a:t>
+            </a:r>
+            <a:r>
+              <a:rPr lang="ru-RU" b="1" dirty="0" err="1"/>
+              <a:t>із</a:t>
+            </a:r>
+            <a:r>
+              <a:rPr lang="ru-RU" b="1" dirty="0"/>
+              <a:t> </a:t>
+            </a:r>
+            <a:r>
+              <a:rPr lang="ru-RU" b="1" dirty="0">
+                <a:solidFill>
+                  <a:srgbClr val="FF0000"/>
+                </a:solidFill>
+              </a:rPr>
+              <a:t>5 тест-</a:t>
+            </a:r>
+            <a:r>
+              <a:rPr lang="ru-RU" b="1" dirty="0" err="1">
+                <a:solidFill>
+                  <a:srgbClr val="FF0000"/>
+                </a:solidFill>
+              </a:rPr>
+              <a:t>смужок</a:t>
+            </a:r>
+            <a:r>
+              <a:rPr lang="ru-RU" b="1" dirty="0">
+                <a:solidFill>
+                  <a:srgbClr val="FF0000"/>
+                </a:solidFill>
+              </a:rPr>
+              <a:t> </a:t>
+            </a:r>
+            <a:r>
+              <a:rPr lang="ru-RU" b="1" dirty="0"/>
+              <a:t>на </a:t>
+            </a:r>
+            <a:r>
+              <a:rPr lang="ru-RU" b="1" dirty="0" err="1"/>
+              <a:t>овуляцію</a:t>
+            </a:r>
+            <a:r>
+              <a:rPr lang="ru-RU" b="1" dirty="0"/>
+              <a:t> для </a:t>
+            </a:r>
+            <a:r>
+              <a:rPr lang="ru-RU" b="1" dirty="0" err="1"/>
+              <a:t>визначення</a:t>
+            </a:r>
+            <a:r>
+              <a:rPr lang="ru-RU" b="1" dirty="0"/>
+              <a:t> фертильного </a:t>
+            </a:r>
+            <a:r>
+              <a:rPr lang="ru-RU" b="1" dirty="0" err="1"/>
+              <a:t>періоду</a:t>
+            </a:r>
+            <a:r>
+              <a:rPr lang="ru-RU" b="1" dirty="0"/>
+              <a:t> у </a:t>
+            </a:r>
+            <a:r>
+              <a:rPr lang="ru-RU" b="1" dirty="0" err="1"/>
+              <a:t>жінки</a:t>
+            </a:r>
+            <a:r>
+              <a:rPr lang="ru-RU" b="1" dirty="0"/>
+              <a:t>.</a:t>
+            </a:r>
+          </a:p>
+          <a:p>
+            <a:endParaRPr lang="ru-RU" b="1" dirty="0"/>
+          </a:p>
+          <a:p>
+            <a:endParaRPr lang="ru-RU" b="1" dirty="0"/>
+          </a:p>
+          <a:p>
+            <a:r>
+              <a:rPr lang="uk-UA" i="1" dirty="0"/>
+              <a:t>Визначає підвищення рівня </a:t>
+            </a:r>
+            <a:r>
+              <a:rPr lang="uk-UA" b="1" i="1" dirty="0" err="1"/>
+              <a:t>лютеїнізуючого</a:t>
+            </a:r>
+            <a:r>
+              <a:rPr lang="uk-UA" b="1" i="1" dirty="0"/>
+              <a:t> гормону (ЛГ)</a:t>
+            </a:r>
+            <a:r>
+              <a:rPr lang="uk-UA" i="1" dirty="0"/>
+              <a:t>, що передує овуляції.</a:t>
+            </a:r>
+          </a:p>
+          <a:p>
+            <a:endParaRPr lang="uk-UA" b="1" dirty="0">
+              <a:effectLst/>
+            </a:endParaRPr>
+          </a:p>
+        </p:txBody>
+      </p:sp>
+      <p:sp>
+        <p:nvSpPr>
+          <p:cNvPr id="5" name="TextBox 4">
+            <a:extLst>
+              <a:ext uri="{FF2B5EF4-FFF2-40B4-BE49-F238E27FC236}">
+                <a16:creationId xmlns:a16="http://schemas.microsoft.com/office/drawing/2014/main" id="{0CE670BC-2E60-0963-A4F6-1FD1E54AF734}"/>
+              </a:ext>
+            </a:extLst>
+          </p:cNvPr>
+          <p:cNvSpPr txBox="1"/>
+          <p:nvPr/>
+        </p:nvSpPr>
+        <p:spPr>
+          <a:xfrm>
+            <a:off x="858795" y="628233"/>
+            <a:ext cx="6178378" cy="584775"/>
+          </a:xfrm>
+          <a:prstGeom prst="rect">
+            <a:avLst/>
+          </a:prstGeom>
+          <a:noFill/>
+        </p:spPr>
+        <p:txBody>
+          <a:bodyPr wrap="square" rtlCol="0">
+            <a:spAutoFit/>
+          </a:bodyPr>
+          <a:lstStyle/>
+          <a:p>
+            <a:r>
+              <a:rPr lang="ru-RU" sz="3200" b="1" dirty="0"/>
+              <a:t>Тест на </a:t>
+            </a:r>
+            <a:r>
+              <a:rPr lang="ru-RU" sz="3200" b="1" dirty="0" err="1"/>
+              <a:t>овуляцію</a:t>
+            </a:r>
+            <a:r>
+              <a:rPr lang="ru-RU" sz="3200" b="1" dirty="0"/>
+              <a:t> SOLO </a:t>
+            </a:r>
+            <a:r>
+              <a:rPr lang="ru-RU" sz="3200" b="1" dirty="0" err="1"/>
+              <a:t>mini</a:t>
+            </a:r>
+            <a:r>
+              <a:rPr lang="ru-RU" sz="3200" b="1" dirty="0"/>
+              <a:t>®</a:t>
+            </a:r>
+            <a:endParaRPr lang="uk-UA" sz="3200" b="1" dirty="0"/>
+          </a:p>
+        </p:txBody>
+      </p:sp>
+      <p:sp>
+        <p:nvSpPr>
+          <p:cNvPr id="6" name="TextBox 5">
+            <a:extLst>
+              <a:ext uri="{FF2B5EF4-FFF2-40B4-BE49-F238E27FC236}">
+                <a16:creationId xmlns:a16="http://schemas.microsoft.com/office/drawing/2014/main" id="{BD26005E-4A43-AB8F-361E-5F94B2BED910}"/>
+              </a:ext>
+            </a:extLst>
+          </p:cNvPr>
+          <p:cNvSpPr txBox="1"/>
+          <p:nvPr/>
+        </p:nvSpPr>
+        <p:spPr>
+          <a:xfrm>
+            <a:off x="304686" y="4275108"/>
+            <a:ext cx="7966104" cy="1200329"/>
+          </a:xfrm>
+          <a:prstGeom prst="rect">
+            <a:avLst/>
+          </a:prstGeom>
+          <a:noFill/>
+        </p:spPr>
+        <p:txBody>
+          <a:bodyPr wrap="square" rtlCol="0">
+            <a:spAutoFit/>
+          </a:bodyPr>
+          <a:lstStyle/>
+          <a:p>
+            <a:pPr marL="285750" indent="-285750">
+              <a:buFont typeface="Wingdings" panose="05000000000000000000" pitchFamily="2" charset="2"/>
+              <a:buChar char="ü"/>
+            </a:pPr>
+            <a:r>
+              <a:rPr lang="ru-RU" b="1" dirty="0" err="1">
+                <a:solidFill>
+                  <a:srgbClr val="FF0000"/>
+                </a:solidFill>
+              </a:rPr>
+              <a:t>Точність</a:t>
+            </a:r>
+            <a:r>
+              <a:rPr lang="ru-RU" dirty="0"/>
+              <a:t> у </a:t>
+            </a:r>
+            <a:r>
+              <a:rPr lang="ru-RU" dirty="0" err="1"/>
+              <a:t>визначенні</a:t>
+            </a:r>
+            <a:r>
+              <a:rPr lang="ru-RU" dirty="0"/>
+              <a:t> </a:t>
+            </a:r>
+            <a:r>
+              <a:rPr lang="ru-RU" dirty="0" err="1"/>
+              <a:t>періоду</a:t>
+            </a:r>
+            <a:r>
+              <a:rPr lang="ru-RU" dirty="0"/>
+              <a:t> </a:t>
+            </a:r>
+            <a:r>
+              <a:rPr lang="ru-RU" dirty="0" err="1"/>
+              <a:t>овуляції</a:t>
+            </a:r>
+            <a:r>
+              <a:rPr lang="ru-RU" dirty="0"/>
+              <a:t>  становить </a:t>
+            </a:r>
+            <a:r>
+              <a:rPr lang="ru-RU" b="1" u="sng" dirty="0">
+                <a:solidFill>
+                  <a:srgbClr val="FF0000"/>
+                </a:solidFill>
+              </a:rPr>
+              <a:t>99,9%!</a:t>
+            </a:r>
+          </a:p>
+          <a:p>
+            <a:pPr marL="285750" indent="-285750">
+              <a:buFont typeface="Wingdings" panose="05000000000000000000" pitchFamily="2" charset="2"/>
+              <a:buChar char="ü"/>
+            </a:pPr>
+            <a:endParaRPr lang="ru-RU" b="1" u="sng" dirty="0">
+              <a:solidFill>
+                <a:srgbClr val="FF0000"/>
+              </a:solidFill>
+            </a:endParaRPr>
+          </a:p>
+          <a:p>
+            <a:pPr marL="285750" indent="-285750">
+              <a:buFont typeface="Wingdings" panose="05000000000000000000" pitchFamily="2" charset="2"/>
+              <a:buChar char="ü"/>
+            </a:pPr>
+            <a:r>
+              <a:rPr lang="ru-RU" dirty="0" err="1"/>
+              <a:t>Швидкий</a:t>
+            </a:r>
+            <a:r>
+              <a:rPr lang="ru-RU" dirty="0"/>
+              <a:t> результат — </a:t>
+            </a:r>
+            <a:r>
+              <a:rPr lang="ru-RU" b="1" dirty="0">
+                <a:solidFill>
+                  <a:srgbClr val="FF0000"/>
+                </a:solidFill>
+              </a:rPr>
+              <a:t>5 </a:t>
+            </a:r>
+            <a:r>
+              <a:rPr lang="ru-RU" b="1" dirty="0" err="1">
+                <a:solidFill>
+                  <a:srgbClr val="FF0000"/>
+                </a:solidFill>
+              </a:rPr>
+              <a:t>хвилин</a:t>
+            </a:r>
+            <a:r>
+              <a:rPr lang="ru-RU" b="1" dirty="0">
+                <a:solidFill>
+                  <a:srgbClr val="FF0000"/>
+                </a:solidFill>
+              </a:rPr>
+              <a:t>.</a:t>
+            </a:r>
+            <a:endParaRPr lang="uk-UA" b="1" u="sng" dirty="0">
+              <a:solidFill>
+                <a:srgbClr val="FF0000"/>
+              </a:solidFill>
+            </a:endParaRPr>
+          </a:p>
+          <a:p>
+            <a:endParaRPr lang="uk-UA" dirty="0"/>
+          </a:p>
+        </p:txBody>
+      </p:sp>
+      <p:pic>
+        <p:nvPicPr>
+          <p:cNvPr id="7" name="Рисунок 6">
+            <a:extLst>
+              <a:ext uri="{FF2B5EF4-FFF2-40B4-BE49-F238E27FC236}">
+                <a16:creationId xmlns:a16="http://schemas.microsoft.com/office/drawing/2014/main" id="{4C4B6A40-AF0A-C158-B299-6CC6D2F84F70}"/>
+              </a:ext>
+            </a:extLst>
+          </p:cNvPr>
+          <p:cNvPicPr>
+            <a:picLocks noChangeAspect="1"/>
+          </p:cNvPicPr>
+          <p:nvPr/>
+        </p:nvPicPr>
+        <p:blipFill>
+          <a:blip r:embed="rId4" cstate="print">
+            <a:extLst>
+              <a:ext uri="{28A0092B-C50C-407E-A947-70E740481C1C}">
+                <a14:useLocalDpi xmlns:a14="http://schemas.microsoft.com/office/drawing/2010/main" val="0"/>
+              </a:ext>
+            </a:extLst>
+          </a:blip>
+          <a:stretch>
+            <a:fillRect/>
+          </a:stretch>
+        </p:blipFill>
+        <p:spPr>
+          <a:xfrm>
+            <a:off x="0" y="5760735"/>
+            <a:ext cx="12192000" cy="1097265"/>
+          </a:xfrm>
+          <a:prstGeom prst="rect">
+            <a:avLst/>
+          </a:prstGeom>
+        </p:spPr>
+      </p:pic>
+    </p:spTree>
+    <p:extLst>
+      <p:ext uri="{BB962C8B-B14F-4D97-AF65-F5344CB8AC3E}">
+        <p14:creationId xmlns:p14="http://schemas.microsoft.com/office/powerpoint/2010/main" val="3214995723"/>
       </p:ext>
     </p:extLst>
   </p:cSld>
